--- a/library/a05-effective-presentation/a05-effective-presentation.pptx
+++ b/library/a05-effective-presentation/a05-effective-presentation.pptx
@@ -3184,7 +3184,7 @@
                   <a:ea typeface="Noto Sans KR" pitchFamily="34" charset="-122"/>
                   <a:cs typeface="Noto Sans KR" pitchFamily="34" charset="-120"/>
                 </a:rPr>
-                <a:t>이 애 본 </a:t>
+                <a:t>이애본</a:t>
               </a:r>
               <a:r>
                 <a:rPr lang="ko-KR" altLang="en-US" sz="1300" dirty="0">
@@ -3195,8 +3195,18 @@
                   <a:ea typeface="Noto Sans KR" pitchFamily="34" charset="-122"/>
                   <a:cs typeface="Noto Sans KR" pitchFamily="34" charset="-120"/>
                 </a:rPr>
-                <a:t> </a:t>
+                <a:t/>
               </a:r>
+              <a:br>
+                <a:rPr lang="en-US" altLang="ko-KR" sz="1300" dirty="0">
+                  <a:solidFill>
+                    <a:srgbClr val="000000"/>
+                  </a:solidFill>
+                  <a:latin typeface="Noto Sans KR" pitchFamily="34" charset="0"/>
+                  <a:ea typeface="Noto Sans KR" pitchFamily="34" charset="-122"/>
+                  <a:cs typeface="Noto Sans KR" pitchFamily="34" charset="-120"/>
+                </a:rPr>
+              </a:br>
               <a:r>
                 <a:rPr lang="en-US" altLang="ko-KR" sz="1300" dirty="0">
                   <a:solidFill>
@@ -3218,7 +3228,7 @@
                   <a:cs typeface="Noto Sans KR" pitchFamily="34" charset="-120"/>
                   <a:hlinkClick r:id="rId4"/>
                 </a:rPr>
-                <a:t>aebon@hs.ac.kr</a:t>
+                <a:t>aebon@dreamitbiz.com</a:t>
               </a:r>
               <a:r>
                 <a:rPr lang="en-US" altLang="ko-KR" sz="1300" dirty="0">
@@ -3245,7 +3255,7 @@
                   <a:ea typeface="Noto Sans KR" pitchFamily="34" charset="-122"/>
                   <a:cs typeface="Noto Sans KR" pitchFamily="34" charset="-120"/>
                 </a:rPr>
-                <a:t>한신대학교 </a:t>
+                <a:t>드림아이티비즈(DreamIT Biz)</a:t>
               </a:r>
               <a:r>
                 <a:rPr lang="en-US" altLang="ko-KR" sz="1400" dirty="0">
@@ -3256,7 +3266,7 @@
                   <a:ea typeface="Noto Sans KR" pitchFamily="34" charset="-122"/>
                   <a:cs typeface="Noto Sans KR" pitchFamily="34" charset="-120"/>
                 </a:rPr>
-                <a:t>AI.SW</a:t>
+                <a:t/>
               </a:r>
               <a:r>
                 <a:rPr lang="ko-KR" altLang="en-US" sz="1400" dirty="0">
@@ -3267,7 +3277,7 @@
                   <a:ea typeface="Noto Sans KR" pitchFamily="34" charset="-122"/>
                   <a:cs typeface="Noto Sans KR" pitchFamily="34" charset="-120"/>
                 </a:rPr>
-                <a:t>대학</a:t>
+                <a:t/>
               </a:r>
               <a:r>
                 <a:rPr lang="ko-KR" altLang="en-US" sz="1300" dirty="0">
@@ -3319,7 +3329,7 @@
                 </a:solidFill>
                 <a:latin typeface="Pretendard"/>
               </a:rPr>
-              <a:t>© 2026 이애본(드림아이티비즈) · useful-ai.dreamitbiz.com · 교육 목적 비영리 이용 · 출처 표기</a:t>
+              <a:t>© 2026 이애본 · 홍문원(洪文院) 발행 · CC BY-NC-ND 4.0 · useful-ai.dreamitbiz.com</a:t>
             </a:r>
           </a:p>
         </p:txBody>
@@ -5675,7 +5685,7 @@
                 </a:solidFill>
                 <a:latin typeface="Pretendard"/>
               </a:rPr>
-              <a:t>© 2026 이애본(드림아이티비즈) · useful-ai.dreamitbiz.com · 교육 목적 비영리 이용 · 출처 표기</a:t>
+              <a:t>© 2026 이애본 · 홍문원(洪文院) 발행 · CC BY-NC-ND 4.0 · useful-ai.dreamitbiz.com</a:t>
             </a:r>
           </a:p>
         </p:txBody>
@@ -7953,7 +7963,7 @@
                 </a:solidFill>
                 <a:latin typeface="Pretendard"/>
               </a:rPr>
-              <a:t>© 2026 이애본(드림아이티비즈) · useful-ai.dreamitbiz.com · 교육 목적 비영리 이용 · 출처 표기</a:t>
+              <a:t>© 2026 이애본 · 홍문원(洪文院) 발행 · CC BY-NC-ND 4.0 · useful-ai.dreamitbiz.com</a:t>
             </a:r>
           </a:p>
         </p:txBody>
@@ -9646,7 +9656,7 @@
                 </a:solidFill>
                 <a:latin typeface="Pretendard"/>
               </a:rPr>
-              <a:t>© 2026 이애본(드림아이티비즈) · useful-ai.dreamitbiz.com · 교육 목적 비영리 이용 · 출처 표기</a:t>
+              <a:t>© 2026 이애본 · 홍문원(洪文院) 발행 · CC BY-NC-ND 4.0 · useful-ai.dreamitbiz.com</a:t>
             </a:r>
           </a:p>
         </p:txBody>
@@ -11174,7 +11184,7 @@
                 </a:solidFill>
                 <a:latin typeface="Pretendard"/>
               </a:rPr>
-              <a:t>© 2026 이애본(드림아이티비즈) · useful-ai.dreamitbiz.com · 교육 목적 비영리 이용 · 출처 표기</a:t>
+              <a:t>© 2026 이애본 · 홍문원(洪文院) 발행 · CC BY-NC-ND 4.0 · useful-ai.dreamitbiz.com</a:t>
             </a:r>
           </a:p>
         </p:txBody>
@@ -12679,7 +12689,7 @@
                 </a:solidFill>
                 <a:latin typeface="Pretendard"/>
               </a:rPr>
-              <a:t>© 2026 이애본(드림아이티비즈) · useful-ai.dreamitbiz.com · 교육 목적 비영리 이용 · 출처 표기</a:t>
+              <a:t>© 2026 이애본 · 홍문원(洪文院) 발행 · CC BY-NC-ND 4.0 · useful-ai.dreamitbiz.com</a:t>
             </a:r>
           </a:p>
         </p:txBody>
@@ -15335,7 +15345,7 @@
                 </a:solidFill>
                 <a:latin typeface="Pretendard"/>
               </a:rPr>
-              <a:t>© 2026 이애본(드림아이티비즈) · useful-ai.dreamitbiz.com · 교육 목적 비영리 이용 · 출처 표기</a:t>
+              <a:t>© 2026 이애본 · 홍문원(洪文院) 발행 · CC BY-NC-ND 4.0 · useful-ai.dreamitbiz.com</a:t>
             </a:r>
           </a:p>
         </p:txBody>
@@ -16483,7 +16493,7 @@
                 </a:solidFill>
                 <a:latin typeface="Pretendard"/>
               </a:rPr>
-              <a:t>© 2026 이애본(드림아이티비즈) · useful-ai.dreamitbiz.com · 교육 목적 비영리 이용 · 출처 표기</a:t>
+              <a:t>© 2026 이애본 · 홍문원(洪文院) 발행 · CC BY-NC-ND 4.0 · useful-ai.dreamitbiz.com</a:t>
             </a:r>
           </a:p>
         </p:txBody>
@@ -17866,7 +17876,7 @@
                 <a:ea typeface="Pretendard" pitchFamily="34" charset="-122"/>
                 <a:cs typeface="Pretendard" pitchFamily="34" charset="-120"/>
               </a:rPr>
-              <a:t>훼방꾼 스타일</a:t>
+              <a:t>비판적 스타일</a:t>
             </a:r>
             <a:endParaRPr lang="en-US" sz="1600" dirty="0"/>
           </a:p>
@@ -18143,7 +18153,7 @@
                 <a:ea typeface="Pretendard" pitchFamily="34" charset="-122"/>
                 <a:cs typeface="Pretendard" pitchFamily="34" charset="-120"/>
               </a:rPr>
-              <a:t>부끄럼쟁이 스타일</a:t>
+              <a:t>소극적 스타일</a:t>
             </a:r>
             <a:endParaRPr lang="en-US" sz="1600" dirty="0"/>
           </a:p>
@@ -18287,7 +18297,7 @@
                 </a:solidFill>
                 <a:latin typeface="Pretendard"/>
               </a:rPr>
-              <a:t>© 2026 이애본(드림아이티비즈) · useful-ai.dreamitbiz.com · 교육 목적 비영리 이용 · 출처 표기</a:t>
+              <a:t>© 2026 이애본 · 홍문원(洪文院) 발행 · CC BY-NC-ND 4.0 · useful-ai.dreamitbiz.com</a:t>
             </a:r>
           </a:p>
         </p:txBody>
@@ -19226,7 +19236,7 @@
                 <a:ea typeface="Pretendard" pitchFamily="34" charset="-122"/>
                 <a:cs typeface="Pretendard" pitchFamily="34" charset="-120"/>
               </a:rPr>
-              <a:t>훼방꾼 스타일</a:t>
+              <a:t>비판적 스타일</a:t>
             </a:r>
             <a:endParaRPr lang="en-US" dirty="0"/>
           </a:p>
@@ -19919,7 +19929,7 @@
                 <a:ea typeface="Pretendard" pitchFamily="34" charset="-122"/>
                 <a:cs typeface="Pretendard" pitchFamily="34" charset="-120"/>
               </a:rPr>
-              <a:t>부끄럼쟁이 스타일</a:t>
+              <a:t>소극적 스타일</a:t>
             </a:r>
             <a:endParaRPr lang="en-US" dirty="0"/>
           </a:p>
@@ -20508,7 +20518,7 @@
                 </a:solidFill>
                 <a:latin typeface="Pretendard"/>
               </a:rPr>
-              <a:t>© 2026 이애본(드림아이티비즈) · useful-ai.dreamitbiz.com · 교육 목적 비영리 이용 · 출처 표기</a:t>
+              <a:t>© 2026 이애본 · 홍문원(洪文院) 발행 · CC BY-NC-ND 4.0 · useful-ai.dreamitbiz.com</a:t>
             </a:r>
           </a:p>
         </p:txBody>
@@ -23229,7 +23239,7 @@
                 </a:solidFill>
                 <a:latin typeface="Pretendard"/>
               </a:rPr>
-              <a:t>© 2026 이애본(드림아이티비즈) · useful-ai.dreamitbiz.com · 교육 목적 비영리 이용 · 출처 표기</a:t>
+              <a:t>© 2026 이애본 · 홍문원(洪文院) 발행 · CC BY-NC-ND 4.0 · useful-ai.dreamitbiz.com</a:t>
             </a:r>
           </a:p>
         </p:txBody>
@@ -23261,45 +23271,6 @@
       </p:grpSpPr>
       <p:sp>
         <p:nvSpPr>
-          <p:cNvPr id="4" name="Text 2"/>
-          <p:cNvSpPr txBox="1"/>
-          <p:nvPr/>
-        </p:nvSpPr>
-        <p:spPr>
-          <a:xfrm>
-            <a:off x="10554005" y="286207"/>
-            <a:ext cx="1143000" cy="228600"/>
-          </a:xfrm>
-          <a:prstGeom prst="rect">
-            <a:avLst/>
-          </a:prstGeom>
-          <a:noFill/>
-          <a:ln/>
-        </p:spPr>
-        <p:txBody>
-          <a:bodyPr wrap="square" lIns="0" tIns="0" rIns="0" bIns="0" rtlCol="0" anchor="ctr"/>
-          <a:lstStyle/>
-          <a:p>
-            <a:pPr marL="0" indent="0" algn="l">
-              <a:buNone/>
-            </a:pPr>
-            <a:r>
-              <a:rPr lang="en-US" sz="1200" dirty="0">
-                <a:solidFill>
-                  <a:srgbClr val="FF6908"/>
-                </a:solidFill>
-                <a:latin typeface="Noto Sans KR" pitchFamily="34" charset="0"/>
-                <a:ea typeface="Noto Sans KR" pitchFamily="34" charset="-122"/>
-                <a:cs typeface="Noto Sans KR" pitchFamily="34" charset="-120"/>
-              </a:rPr>
-              <a:t>JANUARY 2026</a:t>
-            </a:r>
-            <a:endParaRPr lang="en-US" sz="1200" dirty="0"/>
-          </a:p>
-        </p:txBody>
-      </p:sp>
-      <p:sp>
-        <p:nvSpPr>
           <p:cNvPr id="5" name="Text 3"/>
           <p:cNvSpPr txBox="1"/>
           <p:nvPr/>
@@ -23839,7 +23810,7 @@
                 </a:solidFill>
                 <a:latin typeface="Pretendard"/>
               </a:rPr>
-              <a:t>© 2026 이애본(드림아이티비즈) · useful-ai.dreamitbiz.com · 교육 목적 비영리 이용 · 출처 표기</a:t>
+              <a:t>© 2026 이애본 · 홍문원(洪文院) 발행 · CC BY-NC-ND 4.0 · useful-ai.dreamitbiz.com</a:t>
             </a:r>
           </a:p>
         </p:txBody>
@@ -26553,7 +26524,7 @@
                 </a:solidFill>
                 <a:latin typeface="Pretendard"/>
               </a:rPr>
-              <a:t>© 2026 이애본(드림아이티비즈) · useful-ai.dreamitbiz.com · 교육 목적 비영리 이용 · 출처 표기</a:t>
+              <a:t>© 2026 이애본 · 홍문원(洪文院) 발행 · CC BY-NC-ND 4.0 · useful-ai.dreamitbiz.com</a:t>
             </a:r>
           </a:p>
         </p:txBody>
@@ -28122,7 +28093,7 @@
                 </a:solidFill>
                 <a:latin typeface="Pretendard"/>
               </a:rPr>
-              <a:t>© 2026 이애본(드림아이티비즈) · useful-ai.dreamitbiz.com · 교육 목적 비영리 이용 · 출처 표기</a:t>
+              <a:t>© 2026 이애본 · 홍문원(洪文院) 발행 · CC BY-NC-ND 4.0 · useful-ai.dreamitbiz.com</a:t>
             </a:r>
           </a:p>
         </p:txBody>
@@ -29780,7 +29751,7 @@
                 </a:solidFill>
                 <a:latin typeface="Pretendard"/>
               </a:rPr>
-              <a:t>© 2026 이애본(드림아이티비즈) · useful-ai.dreamitbiz.com · 교육 목적 비영리 이용 · 출처 표기</a:t>
+              <a:t>© 2026 이애본 · 홍문원(洪文院) 발행 · CC BY-NC-ND 4.0 · useful-ai.dreamitbiz.com</a:t>
             </a:r>
           </a:p>
         </p:txBody>
@@ -32057,7 +32028,7 @@
                 </a:solidFill>
                 <a:latin typeface="Pretendard"/>
               </a:rPr>
-              <a:t>© 2026 이애본(드림아이티비즈) · useful-ai.dreamitbiz.com · 교육 목적 비영리 이용 · 출처 표기</a:t>
+              <a:t>© 2026 이애본 · 홍문원(洪文院) 발행 · CC BY-NC-ND 4.0 · useful-ai.dreamitbiz.com</a:t>
             </a:r>
           </a:p>
         </p:txBody>
@@ -34332,7 +34303,7 @@
                 </a:solidFill>
                 <a:latin typeface="Pretendard"/>
               </a:rPr>
-              <a:t>© 2026 이애본(드림아이티비즈) · useful-ai.dreamitbiz.com · 교육 목적 비영리 이용 · 출처 표기</a:t>
+              <a:t>© 2026 이애본 · 홍문원(洪文院) 발행 · CC BY-NC-ND 4.0 · useful-ai.dreamitbiz.com</a:t>
             </a:r>
           </a:p>
         </p:txBody>
@@ -36614,7 +36585,7 @@
                 </a:solidFill>
                 <a:latin typeface="Pretendard"/>
               </a:rPr>
-              <a:t>© 2026 이애본(드림아이티비즈) · useful-ai.dreamitbiz.com · 교육 목적 비영리 이용 · 출처 표기</a:t>
+              <a:t>© 2026 이애본 · 홍문원(洪文院) 발행 · CC BY-NC-ND 4.0 · useful-ai.dreamitbiz.com</a:t>
             </a:r>
           </a:p>
         </p:txBody>
@@ -38656,7 +38627,7 @@
                 </a:solidFill>
                 <a:latin typeface="Pretendard"/>
               </a:rPr>
-              <a:t>© 2026 이애본(드림아이티비즈) · useful-ai.dreamitbiz.com · 교육 목적 비영리 이용 · 출처 표기</a:t>
+              <a:t>© 2026 이애본 · 홍문원(洪文院) 발행 · CC BY-NC-ND 4.0 · useful-ai.dreamitbiz.com</a:t>
             </a:r>
           </a:p>
         </p:txBody>
@@ -39136,97 +39107,6 @@
             <a:chExt cx="4156252" cy="523951"/>
           </a:xfrm>
         </p:grpSpPr>
-        <p:sp>
-          <p:nvSpPr>
-            <p:cNvPr id="30" name="Shape 32">
-              <a:extLst>
-                <a:ext uri="{FF2B5EF4-FFF2-40B4-BE49-F238E27FC236}">
-                  <a16:creationId xmlns:a16="http://schemas.microsoft.com/office/drawing/2014/main" id="{95845112-CF79-8059-A0C1-616D00C48C81}"/>
-                </a:ext>
-              </a:extLst>
-            </p:cNvPr>
-            <p:cNvSpPr/>
-            <p:nvPr/>
-          </p:nvSpPr>
-          <p:spPr>
-            <a:xfrm>
-              <a:off x="5699455" y="5572888"/>
-              <a:ext cx="3605262" cy="523951"/>
-            </a:xfrm>
-            <a:prstGeom prst="roundRect">
-              <a:avLst>
-                <a:gd name="adj" fmla="val 158655"/>
-              </a:avLst>
-            </a:prstGeom>
-            <a:solidFill>
-              <a:srgbClr val="FF6908"/>
-            </a:solidFill>
-            <a:ln w="12700">
-              <a:solidFill>
-                <a:srgbClr val="FFFFFF">
-                  <a:alpha val="0"/>
-                </a:srgbClr>
-              </a:solidFill>
-              <a:prstDash val="solid"/>
-            </a:ln>
-            <a:effectLst>
-              <a:outerShdw blurRad="114300" dist="38100" dir="16200000" algn="bl" rotWithShape="0">
-                <a:srgbClr val="FF6908">
-                  <a:alpha val="30000"/>
-                </a:srgbClr>
-              </a:outerShdw>
-            </a:effectLst>
-          </p:spPr>
-          <p:txBody>
-            <a:bodyPr/>
-            <a:lstStyle/>
-            <a:p>
-              <a:endParaRPr lang="ko-KR" altLang="en-US"/>
-            </a:p>
-          </p:txBody>
-        </p:sp>
-        <p:sp>
-          <p:nvSpPr>
-            <p:cNvPr id="31" name="Text 33">
-              <a:extLst>
-                <a:ext uri="{FF2B5EF4-FFF2-40B4-BE49-F238E27FC236}">
-                  <a16:creationId xmlns:a16="http://schemas.microsoft.com/office/drawing/2014/main" id="{3C1DCE20-AEF3-8A81-1F15-35B9DF245AFA}"/>
-                </a:ext>
-              </a:extLst>
-            </p:cNvPr>
-            <p:cNvSpPr txBox="1"/>
-            <p:nvPr/>
-          </p:nvSpPr>
-          <p:spPr>
-            <a:xfrm>
-              <a:off x="5843536" y="5686730"/>
-              <a:ext cx="4012171" cy="280721"/>
-            </a:xfrm>
-            <a:prstGeom prst="rect">
-              <a:avLst/>
-            </a:prstGeom>
-            <a:noFill/>
-            <a:ln/>
-          </p:spPr>
-          <p:txBody>
-            <a:bodyPr wrap="square" lIns="0" tIns="0" rIns="0" bIns="0" rtlCol="0" anchor="ctr"/>
-            <a:lstStyle/>
-            <a:p>
-              <a:r>
-                <a:rPr lang="en-US" sz="1600" b="1" dirty="0">
-                  <a:solidFill>
-                    <a:srgbClr val="FFFFFF"/>
-                  </a:solidFill>
-                  <a:latin typeface="Pretendard" pitchFamily="34" charset="0"/>
-                  <a:ea typeface="Pretendard" pitchFamily="34" charset="-122"/>
-                  <a:cs typeface="Pretendard" pitchFamily="34" charset="-120"/>
-                </a:rPr>
-                <a:t>https://padlet.com/aebon/contents26</a:t>
-              </a:r>
-              <a:endParaRPr lang="en-US" sz="1600" dirty="0"/>
-            </a:p>
-          </p:txBody>
-        </p:sp>
       </p:grpSp>
       <p:sp>
         <p:nvSpPr>
@@ -39262,7 +39142,7 @@
                 </a:solidFill>
                 <a:latin typeface="Pretendard"/>
               </a:rPr>
-              <a:t>© 2026 이애본(드림아이티비즈) · useful-ai.dreamitbiz.com · 교육 목적 비영리 이용 · 출처 표기</a:t>
+              <a:t>© 2026 이애본 · 홍문원(洪文院) 발행 · CC BY-NC-ND 4.0 · useful-ai.dreamitbiz.com</a:t>
             </a:r>
           </a:p>
         </p:txBody>
@@ -39567,7 +39447,7 @@
                 </a:solidFill>
                 <a:latin typeface="Pretendard"/>
               </a:rPr>
-              <a:t>3.  출처 표기 예: 이애본(드림아이티비즈), 「자료 제목」, useful-ai.dreamitbiz.com</a:t>
+              <a:t>3.  출처 표기 예: 이애본(드림아이티비즈), 「자료 제목」, 홍문원, useful-ai.dreamitbiz.com, CC BY-NC-ND 4.0</a:t>
             </a:r>
           </a:p>
           <a:p>
@@ -39644,7 +39524,7 @@
                 </a:solidFill>
                 <a:latin typeface="Pretendard"/>
               </a:rPr>
-              <a:t>© 2026 이애본(드림아이티비즈) · useful-ai.dreamitbiz.com · 교육 목적 비영리 이용 · 출처 표기</a:t>
+              <a:t>© 2026 이애본 · 홍문원(洪文院) 발행 · CC BY-NC-ND 4.0 · useful-ai.dreamitbiz.com</a:t>
             </a:r>
           </a:p>
         </p:txBody>
@@ -39872,7 +39752,7 @@
                 </a:solidFill>
                 <a:latin typeface="Pretendard"/>
               </a:rPr>
-              <a:t>저작권 · 이용 조건</a:t>
+              <a:t>저작권 · 이용 조건 (CC BY-NC-ND 4.0)</a:t>
             </a:r>
           </a:p>
         </p:txBody>
@@ -39911,7 +39791,7 @@
                 </a:solidFill>
                 <a:latin typeface="Pretendard"/>
               </a:rPr>
-              <a:t>1.  저작권 © 2026 이애본(드림아이티비즈 DreamIT Biz). 2026년 1월 「생성형 AI와 창의력·복합문제능력 향상 과정」 강의안을 공개용으로 다시 묶은 것입니다.</a:t>
+              <a:t>1.  저작권 © 2026 이애본(드림아이티비즈 DreamIT Biz). 발행 홍문원(洪文院, 출판사 신고번호 제2026-000026호). 2026년 1월 「생성형 AI와 창의력·복합문제능력 향상 과정」 강의안을 전자출판용으로 다시 묶은 것입니다. ISBN: 등록 후 기재.</a:t>
             </a:r>
           </a:p>
           <a:p>
@@ -39930,7 +39810,7 @@
                 </a:solidFill>
                 <a:latin typeface="Pretendard"/>
               </a:rPr>
-              <a:t>2.  교육 목적의 비영리 이용을 허용합니다 — 출처를 표기해 주세요.</a:t>
+              <a:t>2.  이 자료는 크리에이티브 커먼즈 저작자표시-비영리-변경금지 4.0 국제(CC BY-NC-ND 4.0) 라이선스를 따릅니다. creativecommons.org/licenses/by-nc-nd/4.0/deed.ko</a:t>
             </a:r>
           </a:p>
           <a:p>
@@ -39949,7 +39829,7 @@
                 </a:solidFill>
                 <a:latin typeface="Pretendard"/>
               </a:rPr>
-              <a:t>3.  재배포·판매·변형(내용 수정 후 배포)은 허용하지 않습니다. 필요하면 먼저 문의해 주세요.</a:t>
+              <a:t>3.  저작자 표시(BY): 출처를 밝히면 그대로 복사해 수업·강의·자습에 쓸 수 있습니다. 비영리(NC): 유료 강의·판매·광고 수익 목적에는 쓸 수 없습니다. 변경금지(ND): 내용을 고치거나 잘라 재조합해 배포할 수 없습니다.</a:t>
             </a:r>
           </a:p>
           <a:p>
@@ -39987,7 +39867,7 @@
                 </a:solidFill>
                 <a:latin typeface="Pretendard"/>
               </a:rPr>
-              <a:t>5.  문의 aebon@dreamitbiz.com · 카카오톡 ID aebon</a:t>
+              <a:t>5.  라이선스 범위 밖의 이용(영리·변형·2차 저작)은 먼저 문의해 주세요. aebon@dreamitbiz.com · 카카오톡 ID aebon</a:t>
             </a:r>
           </a:p>
         </p:txBody>
@@ -40026,7 +39906,7 @@
                 </a:solidFill>
                 <a:latin typeface="Pretendard"/>
               </a:rPr>
-              <a:t>© 2026 이애본(드림아이티비즈) · useful-ai.dreamitbiz.com · 교육 목적 비영리 이용 · 출처 표기</a:t>
+              <a:t>© 2026 이애본 · 홍문원(洪文院) 발행 · CC BY-NC-ND 4.0 · useful-ai.dreamitbiz.com</a:t>
             </a:r>
           </a:p>
         </p:txBody>
@@ -41024,7 +40904,7 @@
                 </a:solidFill>
                 <a:latin typeface="Pretendard"/>
               </a:rPr>
-              <a:t>© 2026 이애본(드림아이티비즈) · useful-ai.dreamitbiz.com · 교육 목적 비영리 이용 · 출처 표기</a:t>
+              <a:t>© 2026 이애본 · 홍문원(洪文院) 발행 · CC BY-NC-ND 4.0 · useful-ai.dreamitbiz.com</a:t>
             </a:r>
           </a:p>
         </p:txBody>
@@ -41348,7 +41228,7 @@
                 </a:solidFill>
                 <a:latin typeface="Pretendard"/>
               </a:rPr>
-              <a:t>© 2026 이애본(드림아이티비즈). 교육 목적 비영리 이용 · 출처 표기</a:t>
+              <a:t>© 2026 이애본 · 발행 홍문원(洪文院) · CC BY-NC-ND 4.0</a:t>
             </a:r>
           </a:p>
         </p:txBody>
@@ -41387,7 +41267,7 @@
                 </a:solidFill>
                 <a:latin typeface="Pretendard"/>
               </a:rPr>
-              <a:t>© 2026 이애본(드림아이티비즈) · useful-ai.dreamitbiz.com · 교육 목적 비영리 이용 · 출처 표기</a:t>
+              <a:t>© 2026 이애본 · 홍문원(洪文院) 발행 · CC BY-NC-ND 4.0 · useful-ai.dreamitbiz.com</a:t>
             </a:r>
           </a:p>
         </p:txBody>
@@ -41660,7 +41540,7 @@
                 <a:ea typeface="Pretendard" pitchFamily="34" charset="-122"/>
                 <a:cs typeface="Pretendard" pitchFamily="34" charset="-120"/>
               </a:rPr>
-              <a:t>+43%</a:t>
+              <a:t>DEAL</a:t>
             </a:r>
             <a:endParaRPr lang="en-US" sz="4800" dirty="0"/>
           </a:p>
@@ -41793,7 +41673,7 @@
                 <a:ea typeface="Noto Sans KR" pitchFamily="34" charset="-122"/>
                 <a:cs typeface="Noto Sans KR" pitchFamily="34" charset="-120"/>
               </a:rPr>
-              <a:t> 계약 성공 </a:t>
+              <a:t> 계약 성공 가능성</a:t>
             </a:r>
             <a:r>
               <a:rPr lang="en-US" sz="1400" dirty="0" err="1">
@@ -41804,7 +41684,7 @@
                 <a:ea typeface="Noto Sans KR" pitchFamily="34" charset="-122"/>
                 <a:cs typeface="Noto Sans KR" pitchFamily="34" charset="-120"/>
               </a:rPr>
-              <a:t>확률을</a:t>
+              <a:t>을</a:t>
             </a:r>
             <a:r>
               <a:rPr lang="en-US" sz="1400" dirty="0">
@@ -41834,7 +41714,7 @@
                 <a:ea typeface="Noto Sans KR" pitchFamily="34" charset="-122"/>
                 <a:cs typeface="Noto Sans KR" pitchFamily="34" charset="-120"/>
               </a:rPr>
-              <a:t>획기적으로</a:t>
+              <a:t/>
             </a:r>
             <a:r>
               <a:rPr lang="en-US" sz="1400" dirty="0">
@@ -41845,7 +41725,7 @@
                 <a:ea typeface="Noto Sans KR" pitchFamily="34" charset="-122"/>
                 <a:cs typeface="Noto Sans KR" pitchFamily="34" charset="-120"/>
               </a:rPr>
-              <a:t> 높입니다.</a:t>
+              <a:t>높입니다.</a:t>
             </a:r>
             <a:endParaRPr lang="en-US" sz="1400" dirty="0"/>
           </a:p>
@@ -41982,7 +41862,7 @@
                 <a:ea typeface="Pretendard" pitchFamily="34" charset="-122"/>
                 <a:cs typeface="Pretendard" pitchFamily="34" charset="-120"/>
               </a:rPr>
-              <a:t>+23%</a:t>
+              <a:t>SALES</a:t>
             </a:r>
             <a:endParaRPr lang="en-US" sz="3600" dirty="0"/>
           </a:p>
@@ -42252,7 +42132,7 @@
                 <a:ea typeface="Pretendard" pitchFamily="34" charset="-122"/>
                 <a:cs typeface="Pretendard" pitchFamily="34" charset="-120"/>
               </a:rPr>
-              <a:t>+40%</a:t>
+              <a:t>TIME</a:t>
             </a:r>
             <a:endParaRPr lang="en-US" sz="3600" dirty="0"/>
           </a:p>
@@ -42603,7 +42483,7 @@
                 <a:ea typeface="Noto Sans KR" pitchFamily="34" charset="-122"/>
                 <a:cs typeface="Noto Sans KR" pitchFamily="34" charset="-120"/>
               </a:rPr>
-              <a:t>시각 자료를 활용할 때 </a:t>
+              <a:t>시각 자료를 쓴 발표가 43% 더 설득적이었다는</a:t>
             </a:r>
             <a:r>
               <a:rPr lang="en-US" sz="1200" dirty="0" err="1">
@@ -42614,7 +42494,7 @@
                 <a:ea typeface="Noto Sans KR" pitchFamily="34" charset="-122"/>
                 <a:cs typeface="Noto Sans KR" pitchFamily="34" charset="-120"/>
               </a:rPr>
-              <a:t>청중의</a:t>
+              <a:t/>
             </a:r>
             <a:r>
               <a:rPr lang="en-US" sz="1200" dirty="0">
@@ -42644,7 +42524,7 @@
                 <a:ea typeface="Noto Sans KR" pitchFamily="34" charset="-122"/>
                 <a:cs typeface="Noto Sans KR" pitchFamily="34" charset="-120"/>
               </a:rPr>
-              <a:t>설득력이</a:t>
+              <a:t>실험 결과가 있습니다(Vogel 외, 1986)</a:t>
             </a:r>
             <a:r>
               <a:rPr lang="en-US" sz="1200" dirty="0">
@@ -42655,7 +42535,7 @@
                 <a:ea typeface="Noto Sans KR" pitchFamily="34" charset="-122"/>
                 <a:cs typeface="Noto Sans KR" pitchFamily="34" charset="-120"/>
               </a:rPr>
-              <a:t> 크게 향상됩니다.</a:t>
+              <a:t>.</a:t>
             </a:r>
             <a:endParaRPr lang="en-US" sz="1200" dirty="0"/>
           </a:p>
@@ -42767,8 +42647,8 @@
         </p:nvSpPr>
         <p:spPr>
           <a:xfrm>
-            <a:off x="9002526" y="4300076"/>
-            <a:ext cx="1286561" cy="457200"/>
+            <a:off x="8695807" y="4300076"/>
+            <a:ext cx="1900000" cy="457200"/>
           </a:xfrm>
           <a:prstGeom prst="rect">
             <a:avLst/>
@@ -42792,7 +42672,7 @@
                 <a:ea typeface="Pretendard" pitchFamily="34" charset="-122"/>
                 <a:cs typeface="Pretendard" pitchFamily="34" charset="-120"/>
               </a:rPr>
-              <a:t>+38%</a:t>
+              <a:t>REACH</a:t>
             </a:r>
             <a:endParaRPr lang="en-US" sz="3600" dirty="0"/>
           </a:p>
@@ -42964,7 +42844,7 @@
                 <a:ea typeface="Noto Sans KR" pitchFamily="34" charset="-122"/>
                 <a:cs typeface="Noto Sans KR" pitchFamily="34" charset="-120"/>
               </a:rPr>
-              <a:t>Source: University Minnesota / Wharton University / UCLA / Harvard Business Review</a:t>
+              <a:t>Source: +43% — Vogel, D. R., Dickson, G. W., &amp; Lehman, J. A. (1986). Persuasion and the role of visual presentation support: The UM/3M study. University of Minnesota(3M 후원, 대학원생 대상 실험)</a:t>
             </a:r>
             <a:endParaRPr lang="en-US" sz="900" dirty="0"/>
           </a:p>
@@ -43004,7 +42884,7 @@
                 </a:solidFill>
                 <a:latin typeface="Pretendard"/>
               </a:rPr>
-              <a:t>© 2026 이애본(드림아이티비즈) · useful-ai.dreamitbiz.com · 교육 목적 비영리 이용 · 출처 표기</a:t>
+              <a:t>© 2026 이애본 · 홍문원(洪文院) 발행 · CC BY-NC-ND 4.0 · useful-ai.dreamitbiz.com</a:t>
             </a:r>
           </a:p>
         </p:txBody>
@@ -43613,7 +43493,7 @@
                 </a:solidFill>
                 <a:latin typeface="Pretendard"/>
               </a:rPr>
-              <a:t>© 2026 이애본(드림아이티비즈) · useful-ai.dreamitbiz.com · 교육 목적 비영리 이용 · 출처 표기</a:t>
+              <a:t>© 2026 이애본 · 홍문원(洪文院) 발행 · CC BY-NC-ND 4.0 · useful-ai.dreamitbiz.com</a:t>
             </a:r>
           </a:p>
         </p:txBody>
@@ -44768,7 +44648,7 @@
                 <a:ea typeface="Pretendard" pitchFamily="34" charset="-122"/>
                 <a:cs typeface="Pretendard" pitchFamily="34" charset="-120"/>
               </a:rPr>
-              <a:t>커뮤니케이션 전달 효과 구성비</a:t>
+              <a:t>메라비언 실험의 호감 판단 구성비</a:t>
             </a:r>
             <a:endParaRPr lang="en-US" sz="1800" dirty="0"/>
           </a:p>
@@ -44830,7 +44710,7 @@
                 <a:ea typeface="Noto Sans KR" pitchFamily="34" charset="-122"/>
                 <a:cs typeface="Noto Sans KR" pitchFamily="34" charset="-120"/>
               </a:rPr>
-              <a:t>"시각적 요소가 전체 전달력의 </a:t>
+              <a:t>말과 표정·목소리가 어긋날 때의 호감·태도 판단에 한정된 수치 (Mehrabian, 1971)</a:t>
             </a:r>
             <a:r>
               <a:rPr lang="en-US" sz="1600" b="1" dirty="0">
@@ -44841,7 +44721,7 @@
                 <a:ea typeface="Noto Sans KR" pitchFamily="34" charset="-122"/>
                 <a:cs typeface="Noto Sans KR" pitchFamily="34" charset="-120"/>
               </a:rPr>
-              <a:t>55%</a:t>
+              <a:t/>
             </a:r>
             <a:r>
               <a:rPr lang="en-US" sz="1600" dirty="0">
@@ -44852,7 +44732,7 @@
                 <a:ea typeface="Noto Sans KR" pitchFamily="34" charset="-122"/>
                 <a:cs typeface="Noto Sans KR" pitchFamily="34" charset="-120"/>
               </a:rPr>
-              <a:t>를 차지합니다"</a:t>
+              <a:t/>
             </a:r>
             <a:endParaRPr lang="en-US" sz="1600" dirty="0"/>
           </a:p>
@@ -45148,7 +45028,43 @@
       </p:sp>
       <p:sp>
         <p:nvSpPr>
-          <p:cNvPr id="43" name="deckgen:wrap:footer"/>
+          <p:cNvPr id="43" name="S3 각주"/>
+          <p:cNvSpPr txBox="1"/>
+          <p:nvPr/>
+        </p:nvSpPr>
+        <p:spPr>
+          <a:xfrm>
+            <a:off x="500000" y="6560000"/>
+            <a:ext cx="11200000" cy="250000"/>
+          </a:xfrm>
+          <a:prstGeom prst="rect">
+            <a:avLst/>
+          </a:prstGeom>
+          <a:noFill/>
+        </p:spPr>
+        <p:txBody>
+          <a:bodyPr wrap="square" lIns="0" tIns="0" rIns="0" bIns="0" anchor="t">
+            <a:spAutoFit/>
+          </a:bodyPr>
+          <a:lstStyle/>
+          <a:p>
+            <a:r>
+              <a:rPr lang="ko-KR" sz="900" dirty="0">
+                <a:solidFill>
+                  <a:srgbClr val="6B7280"/>
+                </a:solidFill>
+                <a:latin typeface="Noto Sans KR"/>
+                <a:ea typeface="Noto Sans KR"/>
+                <a:cs typeface="Noto Sans KR"/>
+              </a:rPr>
+              <a:t>Mehrabian, A. (1971). Silent Messages. Wadsworth. — 이 구성비는 말의 호감·태도 판단 실험에 한정된 수치로, 발표 전달력 일반에 적용하는 것은 오용이다.</a:t>
+            </a:r>
+          </a:p>
+        </p:txBody>
+      </p:sp>
+      <p:sp>
+        <p:nvSpPr>
+          <p:cNvPr id="44" name="deckgen:wrap:footer"/>
           <p:cNvSpPr txBox="1"/>
           <p:nvPr/>
         </p:nvSpPr>
@@ -45180,7 +45096,7 @@
                 </a:solidFill>
                 <a:latin typeface="Pretendard"/>
               </a:rPr>
-              <a:t>© 2026 이애본(드림아이티비즈) · useful-ai.dreamitbiz.com · 교육 목적 비영리 이용 · 출처 표기</a:t>
+              <a:t>© 2026 이애본 · 홍문원(洪文院) 발행 · CC BY-NC-ND 4.0 · useful-ai.dreamitbiz.com</a:t>
             </a:r>
           </a:p>
         </p:txBody>
@@ -46461,7 +46377,7 @@
                 </a:solidFill>
                 <a:latin typeface="Pretendard"/>
               </a:rPr>
-              <a:t>© 2026 이애본(드림아이티비즈) · useful-ai.dreamitbiz.com · 교육 목적 비영리 이용 · 출처 표기</a:t>
+              <a:t>© 2026 이애본 · 홍문원(洪文院) 발행 · CC BY-NC-ND 4.0 · useful-ai.dreamitbiz.com</a:t>
             </a:r>
           </a:p>
         </p:txBody>
@@ -48849,7 +48765,7 @@
                 </a:solidFill>
                 <a:latin typeface="Pretendard"/>
               </a:rPr>
-              <a:t>© 2026 이애본(드림아이티비즈) · useful-ai.dreamitbiz.com · 교육 목적 비영리 이용 · 출처 표기</a:t>
+              <a:t>© 2026 이애본 · 홍문원(洪文院) 발행 · CC BY-NC-ND 4.0 · useful-ai.dreamitbiz.com</a:t>
             </a:r>
           </a:p>
         </p:txBody>
@@ -50518,7 +50434,7 @@
                 </a:solidFill>
                 <a:latin typeface="Pretendard"/>
               </a:rPr>
-              <a:t>© 2026 이애본(드림아이티비즈) · useful-ai.dreamitbiz.com · 교육 목적 비영리 이용 · 출처 표기</a:t>
+              <a:t>© 2026 이애본 · 홍문원(洪文院) 발행 · CC BY-NC-ND 4.0 · useful-ai.dreamitbiz.com</a:t>
             </a:r>
           </a:p>
         </p:txBody>

--- a/library/a05-effective-presentation/a05-effective-presentation.pptx
+++ b/library/a05-effective-presentation/a05-effective-presentation.pptx
@@ -12006,7 +12006,7 @@
           <p:spPr>
             <a:xfrm>
               <a:off x="8564271" y="2231898"/>
-              <a:ext cx="1248156" cy="297357"/>
+              <a:ext cx="1651000" cy="297357"/>
             </a:xfrm>
             <a:prstGeom prst="rect">
               <a:avLst/>
@@ -23399,7 +23399,7 @@
               <a:buNone/>
             </a:pPr>
             <a:r>
-              <a:rPr lang="en-US" sz="7500" b="1" dirty="0">
+              <a:rPr lang="en-US" sz="6600" b="1" dirty="0">
                 <a:solidFill>
                   <a:srgbClr val="FF6908"/>
                 </a:solidFill>
@@ -23533,7 +23533,7 @@
               <a:buNone/>
             </a:pPr>
             <a:r>
-              <a:rPr lang="en-US" sz="7500" b="1" dirty="0">
+              <a:rPr lang="en-US" sz="6600" b="1" dirty="0">
                 <a:solidFill>
                   <a:srgbClr val="FF6908"/>
                 </a:solidFill>
@@ -23667,7 +23667,7 @@
               <a:buNone/>
             </a:pPr>
             <a:r>
-              <a:rPr lang="en-US" sz="7500" b="1" dirty="0">
+              <a:rPr lang="en-US" sz="6600" b="1" dirty="0">
                 <a:solidFill>
                   <a:srgbClr val="FF6908"/>
                 </a:solidFill>

--- a/library/a05-effective-presentation/a05-effective-presentation.pptx
+++ b/library/a05-effective-presentation/a05-effective-presentation.pptx
@@ -39791,7 +39791,7 @@
                 </a:solidFill>
                 <a:latin typeface="Pretendard"/>
               </a:rPr>
-              <a:t>1.  저작권 © 2026 이애본(드림아이티비즈 DreamIT Biz). 발행 홍문원(洪文院, 출판사 신고번호 제2026-000026호). 2026년 1월 「생성형 AI와 창의력·복합문제능력 향상 과정」 강의안을 전자출판용으로 다시 묶은 것입니다. ISBN: 등록 후 기재.</a:t>
+              <a:t>1.  저작권 © 2026 이애본(드림아이티비즈 DreamIT Biz). 발행 홍문원(洪文院, 출판사 신고번호 제2026-000026호). 이애본이 2026년 대학·기관 강의 현장에서 쓴 강의안을 전자출판용으로 다시 묶은 것입니다. ISBN: 등록 후 기재.</a:t>
             </a:r>
           </a:p>
           <a:p>
